--- a/module01-vfs-terminal/slides.pptx
+++ b/module01-vfs-terminal/slides.pptx
@@ -578,7 +578,7 @@
           <a:lstStyle/>
           <a:p>
             <a:r>
-              <a:t>A terminal session always has a current working directory. Print it with the print-working-directory command. Change it with change-directory. List what is here with the list command. Relative paths are resolved against where you are now; that is why the same short path can succeed in one place and fail after you move.</a:t>
+              <a:t>A terminal session always has a current working directory. Print it with pwd—print working directory. Change it with cd—change directory. List what is here with ls—list. Relative paths are resolved against where you are now; that is why the same short path can succeed in one place and fail after you move.</a:t>
             </a:r>
           </a:p>
         </p:txBody>
@@ -648,7 +648,7 @@
           <a:lstStyle/>
           <a:p>
             <a:r>
-              <a:t>In the browser lab, look at three pieces: the challenge card, the sandboxed prompt, and the tree on the side. Start the first challenge, try a list or a change-directory, then use Check when you think you are done. You do not need a full tour here—the lab itself guides the rest. Explore a few challenges, then come back for the real shell track.</a:t>
+              <a:t>In the browser lab, look at three pieces: the challenge card, the sandboxed prompt, and the tree on the side. Start the first challenge: try ls to list names, or cd to change directory, then use Check when you think you are done. You do not need a full tour here—the lab itself guides the rest. Explore a few challenges, then come back for the real shell track.</a:t>
             </a:r>
           </a:p>
         </p:txBody>
@@ -718,7 +718,7 @@
           <a:lstStyle/>
           <a:p>
             <a:r>
-              <a:t>In the real Unix track, open this module’s navigation example in your terminal. Print the working directory, list with a long listing, step into the sample project folder, then move back up. Those three moves—where am I, what is here, go somewhere—are the muscle you will reuse in every later module, including when you run simulators like Icarus and Verilator. More trees live under this module’s examples folder when you want extra practice.</a:t>
+              <a:t>In the real Unix track, open this module’s navigation example in your terminal. First run pwd to print the working directory—so you know where you are. Then run ls with minus ell ay: long format, and include hidden files that start with a dot. Next, cd into sample_repo to change into that folder, run ls again for a short name list, then cd with two dots to move up one level. Those three moves—where am I, what is here, go somewhere—are the muscle you will reuse in every later module, including when you run simulators like Icarus and Verilator.</a:t>
             </a:r>
           </a:p>
         </p:txBody>
@@ -788,7 +788,7 @@
           <a:lstStyle/>
           <a:p>
             <a:r>
-              <a:t>Do not confuse a directory name with a file name when you change directories. Remember that a leading slash starts from the filesystem root, while a plain name is relative to where you are. Hidden files start with a dot and may not show unless you ask for them. And remember: the browser lab is for literacy—scripts you keep still belong on a real shell.</a:t>
+              <a:t>Do not confuse a directory name with a file name when you change directories. Remember that a leading slash starts from the filesystem root, while a plain name is relative to where you are. Hidden files start with a dot and may not show unless you ask for them with a flag like minus ay. And remember: the browser lab is for literacy—scripts you keep still belong on a real shell.</a:t>
             </a:r>
           </a:p>
         </p:txBody>
@@ -4083,7 +4083,7 @@
                 </a:solidFill>
                 <a:latin typeface="Calibri"/>
               </a:rPr>
-              <a:t>Print it with the print-working-directory command</a:t>
+              <a:t>Print it with pwd, print working directory</a:t>
             </a:r>
           </a:p>
           <a:p>
@@ -4105,7 +4105,7 @@
                 </a:solidFill>
                 <a:latin typeface="Calibri"/>
               </a:rPr>
-              <a:t>Change it with change-directory</a:t>
+              <a:t>Change it with cd, change directory</a:t>
             </a:r>
           </a:p>
           <a:p>
@@ -4127,7 +4127,7 @@
                 </a:solidFill>
                 <a:latin typeface="Calibri"/>
               </a:rPr>
-              <a:t>List what is here with the list command</a:t>
+              <a:t>List what is here with ls, list</a:t>
             </a:r>
           </a:p>
           <a:p>
@@ -4597,7 +4597,7 @@
                 <a:spcPts val="2200"/>
               </a:lnSpc>
               <a:spcAft>
-                <a:spcPts val="400"/>
+                <a:spcPts val="600"/>
               </a:spcAft>
             </a:pPr>
             <a:r>
@@ -4607,7 +4607,7 @@
                 </a:solidFill>
                 <a:latin typeface="Consolas"/>
               </a:rPr>
-              <a:t>pwd</a:t>
+              <a:t># pwd — print working directory (where am I?)</a:t>
             </a:r>
           </a:p>
           <a:p>
@@ -4616,7 +4616,7 @@
                 <a:spcPts val="2200"/>
               </a:lnSpc>
               <a:spcAft>
-                <a:spcPts val="400"/>
+                <a:spcPts val="600"/>
               </a:spcAft>
             </a:pPr>
             <a:r>
@@ -4626,7 +4626,7 @@
                 </a:solidFill>
                 <a:latin typeface="Consolas"/>
               </a:rPr>
-              <a:t>ls -la</a:t>
+              <a:t>pwd</a:t>
             </a:r>
           </a:p>
           <a:p>
@@ -4635,7 +4635,7 @@
                 <a:spcPts val="2200"/>
               </a:lnSpc>
               <a:spcAft>
-                <a:spcPts val="400"/>
+                <a:spcPts val="600"/>
               </a:spcAft>
             </a:pPr>
             <a:r>
@@ -4645,7 +4645,7 @@
                 </a:solidFill>
                 <a:latin typeface="Consolas"/>
               </a:rPr>
-              <a:t>cd sample_repo</a:t>
+              <a:t/>
             </a:r>
           </a:p>
           <a:p>
@@ -4654,7 +4654,7 @@
                 <a:spcPts val="2200"/>
               </a:lnSpc>
               <a:spcAft>
-                <a:spcPts val="400"/>
+                <a:spcPts val="600"/>
               </a:spcAft>
             </a:pPr>
             <a:r>
@@ -4664,7 +4664,7 @@
                 </a:solidFill>
                 <a:latin typeface="Consolas"/>
               </a:rPr>
-              <a:t>ls</a:t>
+              <a:t># ls -la — list all entries, long format (what is here?)</a:t>
             </a:r>
           </a:p>
           <a:p>
@@ -4673,7 +4673,178 @@
                 <a:spcPts val="2200"/>
               </a:lnSpc>
               <a:spcAft>
-                <a:spcPts val="400"/>
+                <a:spcPts val="600"/>
+              </a:spcAft>
+            </a:pPr>
+            <a:r>
+              <a:rPr sz="2000" b="0">
+                <a:solidFill>
+                  <a:srgbClr val="333333"/>
+                </a:solidFill>
+                <a:latin typeface="Consolas"/>
+              </a:rPr>
+              <a:t>ls -la</a:t>
+            </a:r>
+          </a:p>
+          <a:p>
+            <a:pPr>
+              <a:lnSpc>
+                <a:spcPts val="2200"/>
+              </a:lnSpc>
+              <a:spcAft>
+                <a:spcPts val="600"/>
+              </a:spcAft>
+            </a:pPr>
+            <a:r>
+              <a:rPr sz="2000" b="0">
+                <a:solidFill>
+                  <a:srgbClr val="333333"/>
+                </a:solidFill>
+                <a:latin typeface="Consolas"/>
+              </a:rPr>
+              <a:t/>
+            </a:r>
+          </a:p>
+          <a:p>
+            <a:pPr>
+              <a:lnSpc>
+                <a:spcPts val="2200"/>
+              </a:lnSpc>
+              <a:spcAft>
+                <a:spcPts val="600"/>
+              </a:spcAft>
+            </a:pPr>
+            <a:r>
+              <a:rPr sz="2000" b="0">
+                <a:solidFill>
+                  <a:srgbClr val="333333"/>
+                </a:solidFill>
+                <a:latin typeface="Consolas"/>
+              </a:rPr>
+              <a:t># cd sample_repo — change into this directory</a:t>
+            </a:r>
+          </a:p>
+          <a:p>
+            <a:pPr>
+              <a:lnSpc>
+                <a:spcPts val="2200"/>
+              </a:lnSpc>
+              <a:spcAft>
+                <a:spcPts val="600"/>
+              </a:spcAft>
+            </a:pPr>
+            <a:r>
+              <a:rPr sz="2000" b="0">
+                <a:solidFill>
+                  <a:srgbClr val="333333"/>
+                </a:solidFill>
+                <a:latin typeface="Consolas"/>
+              </a:rPr>
+              <a:t>cd sample_repo</a:t>
+            </a:r>
+          </a:p>
+          <a:p>
+            <a:pPr>
+              <a:lnSpc>
+                <a:spcPts val="2200"/>
+              </a:lnSpc>
+              <a:spcAft>
+                <a:spcPts val="600"/>
+              </a:spcAft>
+            </a:pPr>
+            <a:r>
+              <a:rPr sz="2000" b="0">
+                <a:solidFill>
+                  <a:srgbClr val="333333"/>
+                </a:solidFill>
+                <a:latin typeface="Consolas"/>
+              </a:rPr>
+              <a:t/>
+            </a:r>
+          </a:p>
+          <a:p>
+            <a:pPr>
+              <a:lnSpc>
+                <a:spcPts val="2200"/>
+              </a:lnSpc>
+              <a:spcAft>
+                <a:spcPts val="600"/>
+              </a:spcAft>
+            </a:pPr>
+            <a:r>
+              <a:rPr sz="2000" b="0">
+                <a:solidFill>
+                  <a:srgbClr val="333333"/>
+                </a:solidFill>
+                <a:latin typeface="Consolas"/>
+              </a:rPr>
+              <a:t># ls — list names only</a:t>
+            </a:r>
+          </a:p>
+          <a:p>
+            <a:pPr>
+              <a:lnSpc>
+                <a:spcPts val="2200"/>
+              </a:lnSpc>
+              <a:spcAft>
+                <a:spcPts val="600"/>
+              </a:spcAft>
+            </a:pPr>
+            <a:r>
+              <a:rPr sz="2000" b="0">
+                <a:solidFill>
+                  <a:srgbClr val="333333"/>
+                </a:solidFill>
+                <a:latin typeface="Consolas"/>
+              </a:rPr>
+              <a:t>ls</a:t>
+            </a:r>
+          </a:p>
+          <a:p>
+            <a:pPr>
+              <a:lnSpc>
+                <a:spcPts val="2200"/>
+              </a:lnSpc>
+              <a:spcAft>
+                <a:spcPts val="600"/>
+              </a:spcAft>
+            </a:pPr>
+            <a:r>
+              <a:rPr sz="2000" b="0">
+                <a:solidFill>
+                  <a:srgbClr val="333333"/>
+                </a:solidFill>
+                <a:latin typeface="Consolas"/>
+              </a:rPr>
+              <a:t/>
+            </a:r>
+          </a:p>
+          <a:p>
+            <a:pPr>
+              <a:lnSpc>
+                <a:spcPts val="2200"/>
+              </a:lnSpc>
+              <a:spcAft>
+                <a:spcPts val="600"/>
+              </a:spcAft>
+            </a:pPr>
+            <a:r>
+              <a:rPr sz="2000" b="0">
+                <a:solidFill>
+                  <a:srgbClr val="333333"/>
+                </a:solidFill>
+                <a:latin typeface="Consolas"/>
+              </a:rPr>
+              <a:t># cd .. — go up one directory</a:t>
+            </a:r>
+          </a:p>
+          <a:p>
+            <a:pPr>
+              <a:lnSpc>
+                <a:spcPts val="2200"/>
+              </a:lnSpc>
+              <a:spcAft>
+                <a:spcPts val="600"/>
               </a:spcAft>
             </a:pPr>
             <a:r>
@@ -4868,7 +5039,7 @@
                 </a:solidFill>
                 <a:latin typeface="Calibri"/>
               </a:rPr>
-              <a:t>Hidden files start with a dot and may not show unless you ask for them</a:t>
+              <a:t>Hidden files start with a dot and may not show unless you ask for them with a flag like</a:t>
             </a:r>
           </a:p>
           <a:p>
